--- a/soutenance/CipherMark_soutenance.pptx
+++ b/soutenance/CipherMark_soutenance.pptx
@@ -5397,7 +5397,7 @@
                 </a:solidFill>
                 <a:latin typeface="Arial"/>
               </a:rPr>
-              <a:t>Dr HAMINOU</a:t>
+              <a:t>Pr Aminou HALIDOU</a:t>
             </a:r>
           </a:p>
         </p:txBody>

--- a/soutenance/CipherMark_soutenance.pptx
+++ b/soutenance/CipherMark_soutenance.pptx
@@ -5323,7 +5323,7 @@
                 </a:solidFill>
                 <a:latin typeface="Arial"/>
               </a:rPr>
-              <a:t>NGUEAGHO TIODONG Roberto Landry</a:t>
+              <a:t>NGUEAGHO TIODONG ROBERTO LANDRY</a:t>
             </a:r>
           </a:p>
           <a:p>
@@ -5397,7 +5397,23 @@
                 </a:solidFill>
                 <a:latin typeface="Arial"/>
               </a:rPr>
-              <a:t>Pr Aminou HALIDOU</a:t>
+              <a:t>AMINOU HALIDOU</a:t>
+            </a:r>
+          </a:p>
+          <a:p>
+            <a:pPr algn="l">
+              <a:lnSpc>
+                <a:spcPct val="115000"/>
+              </a:lnSpc>
+            </a:pPr>
+            <a:r>
+              <a:rPr sz="1400" b="0">
+                <a:solidFill>
+                  <a:srgbClr val="9AA4B0"/>
+                </a:solidFill>
+                <a:latin typeface="Arial"/>
+              </a:rPr>
+              <a:t>Maître de Conférences</a:t>
             </a:r>
           </a:p>
         </p:txBody>
@@ -9035,7 +9051,7 @@
                 </a:solidFill>
                 <a:latin typeface="Arial"/>
               </a:rPr>
-              <a:t>NGUEAGHO TIODONG Roberto Landry</a:t>
+              <a:t>NGUEAGHO TIODONG ROBERTO LANDRY</a:t>
             </a:r>
           </a:p>
           <a:p>
